--- a/koreatech-db/theory/이론5장_트랜잭션과_동시성.pptx
+++ b/koreatech-db/theory/이론5장_트랜잭션과_동시성.pptx
@@ -5418,9 +5418,9 @@
                 <a:solidFill>
                   <a:srgbClr val="7A869C"/>
                 </a:solidFill>
-                <a:latin typeface="나눔고딕코딩"/>
-                <a:ea typeface="나눔고딕코딩"/>
-                <a:cs typeface="나눔고딕코딩"/>
+                <a:latin typeface="D2Coding"/>
+                <a:ea typeface="D2Coding"/>
+                <a:cs typeface="D2Coding"/>
               </a:rPr>
               <a:t>1</a:t>
             </a:r>
@@ -5436,9 +5436,9 @@
                 <a:solidFill>
                   <a:srgbClr val="7A869C"/>
                 </a:solidFill>
-                <a:latin typeface="나눔고딕코딩"/>
-                <a:ea typeface="나눔고딕코딩"/>
-                <a:cs typeface="나눔고딕코딩"/>
+                <a:latin typeface="D2Coding"/>
+                <a:ea typeface="D2Coding"/>
+                <a:cs typeface="D2Coding"/>
               </a:rPr>
               <a:t>2</a:t>
             </a:r>
@@ -5454,9 +5454,9 @@
                 <a:solidFill>
                   <a:srgbClr val="7A869C"/>
                 </a:solidFill>
-                <a:latin typeface="나눔고딕코딩"/>
-                <a:ea typeface="나눔고딕코딩"/>
-                <a:cs typeface="나눔고딕코딩"/>
+                <a:latin typeface="D2Coding"/>
+                <a:ea typeface="D2Coding"/>
+                <a:cs typeface="D2Coding"/>
               </a:rPr>
               <a:t>3</a:t>
             </a:r>
@@ -5472,9 +5472,9 @@
                 <a:solidFill>
                   <a:srgbClr val="7A869C"/>
                 </a:solidFill>
-                <a:latin typeface="나눔고딕코딩"/>
-                <a:ea typeface="나눔고딕코딩"/>
-                <a:cs typeface="나눔고딕코딩"/>
+                <a:latin typeface="D2Coding"/>
+                <a:ea typeface="D2Coding"/>
+                <a:cs typeface="D2Coding"/>
               </a:rPr>
               <a:t>4</a:t>
             </a:r>
@@ -5490,9 +5490,9 @@
                 <a:solidFill>
                   <a:srgbClr val="7A869C"/>
                 </a:solidFill>
-                <a:latin typeface="나눔고딕코딩"/>
-                <a:ea typeface="나눔고딕코딩"/>
-                <a:cs typeface="나눔고딕코딩"/>
+                <a:latin typeface="D2Coding"/>
+                <a:ea typeface="D2Coding"/>
+                <a:cs typeface="D2Coding"/>
               </a:rPr>
               <a:t>5</a:t>
             </a:r>
@@ -5508,9 +5508,9 @@
                 <a:solidFill>
                   <a:srgbClr val="7A869C"/>
                 </a:solidFill>
-                <a:latin typeface="나눔고딕코딩"/>
-                <a:ea typeface="나눔고딕코딩"/>
-                <a:cs typeface="나눔고딕코딩"/>
+                <a:latin typeface="D2Coding"/>
+                <a:ea typeface="D2Coding"/>
+                <a:cs typeface="D2Coding"/>
               </a:rPr>
               <a:t>6</a:t>
             </a:r>
@@ -5526,9 +5526,9 @@
                 <a:solidFill>
                   <a:srgbClr val="7A869C"/>
                 </a:solidFill>
-                <a:latin typeface="나눔고딕코딩"/>
-                <a:ea typeface="나눔고딕코딩"/>
-                <a:cs typeface="나눔고딕코딩"/>
+                <a:latin typeface="D2Coding"/>
+                <a:ea typeface="D2Coding"/>
+                <a:cs typeface="D2Coding"/>
               </a:rPr>
               <a:t>7</a:t>
             </a:r>
@@ -5544,9 +5544,9 @@
                 <a:solidFill>
                   <a:srgbClr val="7A869C"/>
                 </a:solidFill>
-                <a:latin typeface="나눔고딕코딩"/>
-                <a:ea typeface="나눔고딕코딩"/>
-                <a:cs typeface="나눔고딕코딩"/>
+                <a:latin typeface="D2Coding"/>
+                <a:ea typeface="D2Coding"/>
+                <a:cs typeface="D2Coding"/>
               </a:rPr>
               <a:t>8</a:t>
             </a:r>
@@ -5562,9 +5562,9 @@
                 <a:solidFill>
                   <a:srgbClr val="7A869C"/>
                 </a:solidFill>
-                <a:latin typeface="나눔고딕코딩"/>
-                <a:ea typeface="나눔고딕코딩"/>
-                <a:cs typeface="나눔고딕코딩"/>
+                <a:latin typeface="D2Coding"/>
+                <a:ea typeface="D2Coding"/>
+                <a:cs typeface="D2Coding"/>
               </a:rPr>
               <a:t>9</a:t>
             </a:r>
@@ -5580,9 +5580,9 @@
                 <a:solidFill>
                   <a:srgbClr val="7A869C"/>
                 </a:solidFill>
-                <a:latin typeface="나눔고딕코딩"/>
-                <a:ea typeface="나눔고딕코딩"/>
-                <a:cs typeface="나눔고딕코딩"/>
+                <a:latin typeface="D2Coding"/>
+                <a:ea typeface="D2Coding"/>
+                <a:cs typeface="D2Coding"/>
               </a:rPr>
               <a:t>10</a:t>
             </a:r>
@@ -5598,9 +5598,9 @@
                 <a:solidFill>
                   <a:srgbClr val="7A869C"/>
                 </a:solidFill>
-                <a:latin typeface="나눔고딕코딩"/>
-                <a:ea typeface="나눔고딕코딩"/>
-                <a:cs typeface="나눔고딕코딩"/>
+                <a:latin typeface="D2Coding"/>
+                <a:ea typeface="D2Coding"/>
+                <a:cs typeface="D2Coding"/>
               </a:rPr>
               <a:t>11</a:t>
             </a:r>
@@ -5616,9 +5616,9 @@
                 <a:solidFill>
                   <a:srgbClr val="7A869C"/>
                 </a:solidFill>
-                <a:latin typeface="나눔고딕코딩"/>
-                <a:ea typeface="나눔고딕코딩"/>
-                <a:cs typeface="나눔고딕코딩"/>
+                <a:latin typeface="D2Coding"/>
+                <a:ea typeface="D2Coding"/>
+                <a:cs typeface="D2Coding"/>
               </a:rPr>
               <a:t>12</a:t>
             </a:r>
@@ -5657,9 +5657,9 @@
                 <a:solidFill>
                   <a:srgbClr val="E6EAF2"/>
                 </a:solidFill>
-                <a:latin typeface="나눔고딕코딩"/>
-                <a:ea typeface="나눔고딕코딩"/>
-                <a:cs typeface="나눔고딕코딩"/>
+                <a:latin typeface="D2Coding"/>
+                <a:ea typeface="D2Coding"/>
+                <a:cs typeface="D2Coding"/>
               </a:rPr>
               <a:t>-- 주문 1005(장민혁, 제주 감귤 2박스)가 취소 요청됐다고 하자.</a:t>
             </a:r>
@@ -5675,9 +5675,9 @@
                 <a:solidFill>
                   <a:srgbClr val="E6EAF2"/>
                 </a:solidFill>
-                <a:latin typeface="나눔고딕코딩"/>
-                <a:ea typeface="나눔고딕코딩"/>
-                <a:cs typeface="나눔고딕코딩"/>
+                <a:latin typeface="D2Coding"/>
+                <a:ea typeface="D2Coding"/>
+                <a:cs typeface="D2Coding"/>
               </a:rPr>
               <a:t>START TRANSACTION;</a:t>
             </a:r>
@@ -5693,9 +5693,9 @@
                 <a:solidFill>
                   <a:srgbClr val="E6EAF2"/>
                 </a:solidFill>
-                <a:latin typeface="나눔고딕코딩"/>
-                <a:ea typeface="나눔고딕코딩"/>
-                <a:cs typeface="나눔고딕코딩"/>
+                <a:latin typeface="D2Coding"/>
+                <a:ea typeface="D2Coding"/>
+                <a:cs typeface="D2Coding"/>
               </a:rPr>
               <a:t/>
             </a:r>
@@ -5711,9 +5711,9 @@
                 <a:solidFill>
                   <a:srgbClr val="E6EAF2"/>
                 </a:solidFill>
-                <a:latin typeface="나눔고딕코딩"/>
-                <a:ea typeface="나눔고딕코딩"/>
-                <a:cs typeface="나눔고딕코딩"/>
+                <a:latin typeface="D2Coding"/>
+                <a:ea typeface="D2Coding"/>
+                <a:cs typeface="D2Coding"/>
               </a:rPr>
               <a:t>-- ① 주문 상태를 취소로 변경</a:t>
             </a:r>
@@ -5729,9 +5729,9 @@
                 <a:solidFill>
                   <a:srgbClr val="E6EAF2"/>
                 </a:solidFill>
-                <a:latin typeface="나눔고딕코딩"/>
-                <a:ea typeface="나눔고딕코딩"/>
-                <a:cs typeface="나눔고딕코딩"/>
+                <a:latin typeface="D2Coding"/>
+                <a:ea typeface="D2Coding"/>
+                <a:cs typeface="D2Coding"/>
               </a:rPr>
               <a:t>UPDATE orders SET status = '취소' WHERE order_id = 1005;</a:t>
             </a:r>
@@ -5747,9 +5747,9 @@
                 <a:solidFill>
                   <a:srgbClr val="E6EAF2"/>
                 </a:solidFill>
-                <a:latin typeface="나눔고딕코딩"/>
-                <a:ea typeface="나눔고딕코딩"/>
-                <a:cs typeface="나눔고딕코딩"/>
+                <a:latin typeface="D2Coding"/>
+                <a:ea typeface="D2Coding"/>
+                <a:cs typeface="D2Coding"/>
               </a:rPr>
               <a:t/>
             </a:r>
@@ -5765,9 +5765,9 @@
                 <a:solidFill>
                   <a:srgbClr val="E6EAF2"/>
                 </a:solidFill>
-                <a:latin typeface="나눔고딕코딩"/>
-                <a:ea typeface="나눔고딕코딩"/>
-                <a:cs typeface="나눔고딕코딩"/>
+                <a:latin typeface="D2Coding"/>
+                <a:ea typeface="D2Coding"/>
+                <a:cs typeface="D2Coding"/>
               </a:rPr>
               <a:t>-- ② 빠져나갔던 재고를 복구</a:t>
             </a:r>
@@ -5783,9 +5783,9 @@
                 <a:solidFill>
                   <a:srgbClr val="E6EAF2"/>
                 </a:solidFill>
-                <a:latin typeface="나눔고딕코딩"/>
-                <a:ea typeface="나눔고딕코딩"/>
-                <a:cs typeface="나눔고딕코딩"/>
+                <a:latin typeface="D2Coding"/>
+                <a:ea typeface="D2Coding"/>
+                <a:cs typeface="D2Coding"/>
               </a:rPr>
               <a:t>UPDATE products SET stock = stock + 2 WHERE prod_id = 'P004';</a:t>
             </a:r>
@@ -5801,9 +5801,9 @@
                 <a:solidFill>
                   <a:srgbClr val="E6EAF2"/>
                 </a:solidFill>
-                <a:latin typeface="나눔고딕코딩"/>
-                <a:ea typeface="나눔고딕코딩"/>
-                <a:cs typeface="나눔고딕코딩"/>
+                <a:latin typeface="D2Coding"/>
+                <a:ea typeface="D2Coding"/>
+                <a:cs typeface="D2Coding"/>
               </a:rPr>
               <a:t/>
             </a:r>
@@ -5819,9 +5819,9 @@
                 <a:solidFill>
                   <a:srgbClr val="E6EAF2"/>
                 </a:solidFill>
-                <a:latin typeface="나눔고딕코딩"/>
-                <a:ea typeface="나눔고딕코딩"/>
-                <a:cs typeface="나눔고딕코딩"/>
+                <a:latin typeface="D2Coding"/>
+                <a:ea typeface="D2Coding"/>
+                <a:cs typeface="D2Coding"/>
               </a:rPr>
               <a:t>-- 확인 후 문제없으면 확정, 잘못 건드렸으면 되돌리기</a:t>
             </a:r>
@@ -5837,9 +5837,9 @@
                 <a:solidFill>
                   <a:srgbClr val="E6EAF2"/>
                 </a:solidFill>
-                <a:latin typeface="나눔고딕코딩"/>
-                <a:ea typeface="나눔고딕코딩"/>
-                <a:cs typeface="나눔고딕코딩"/>
+                <a:latin typeface="D2Coding"/>
+                <a:ea typeface="D2Coding"/>
+                <a:cs typeface="D2Coding"/>
               </a:rPr>
               <a:t>COMMIT;      -- 확정</a:t>
             </a:r>
@@ -5855,9 +5855,9 @@
                 <a:solidFill>
                   <a:srgbClr val="E6EAF2"/>
                 </a:solidFill>
-                <a:latin typeface="나눔고딕코딩"/>
-                <a:ea typeface="나눔고딕코딩"/>
-                <a:cs typeface="나눔고딕코딩"/>
+                <a:latin typeface="D2Coding"/>
+                <a:ea typeface="D2Coding"/>
+                <a:cs typeface="D2Coding"/>
               </a:rPr>
               <a:t>-- ROLLBACK; -- 취소 (COMMIT 대신 실행하면 두 UPDATE가 모두 무효)</a:t>
             </a:r>
@@ -25946,9 +25946,9 @@
                 <a:solidFill>
                   <a:srgbClr val="7A869C"/>
                 </a:solidFill>
-                <a:latin typeface="나눔고딕코딩"/>
-                <a:ea typeface="나눔고딕코딩"/>
-                <a:cs typeface="나눔고딕코딩"/>
+                <a:latin typeface="D2Coding"/>
+                <a:ea typeface="D2Coding"/>
+                <a:cs typeface="D2Coding"/>
               </a:rPr>
               <a:t>1</a:t>
             </a:r>
@@ -25964,9 +25964,9 @@
                 <a:solidFill>
                   <a:srgbClr val="7A869C"/>
                 </a:solidFill>
-                <a:latin typeface="나눔고딕코딩"/>
-                <a:ea typeface="나눔고딕코딩"/>
-                <a:cs typeface="나눔고딕코딩"/>
+                <a:latin typeface="D2Coding"/>
+                <a:ea typeface="D2Coding"/>
+                <a:cs typeface="D2Coding"/>
               </a:rPr>
               <a:t>2</a:t>
             </a:r>
@@ -25982,9 +25982,9 @@
                 <a:solidFill>
                   <a:srgbClr val="7A869C"/>
                 </a:solidFill>
-                <a:latin typeface="나눔고딕코딩"/>
-                <a:ea typeface="나눔고딕코딩"/>
-                <a:cs typeface="나눔고딕코딩"/>
+                <a:latin typeface="D2Coding"/>
+                <a:ea typeface="D2Coding"/>
+                <a:cs typeface="D2Coding"/>
               </a:rPr>
               <a:t>3</a:t>
             </a:r>
@@ -26000,9 +26000,9 @@
                 <a:solidFill>
                   <a:srgbClr val="7A869C"/>
                 </a:solidFill>
-                <a:latin typeface="나눔고딕코딩"/>
-                <a:ea typeface="나눔고딕코딩"/>
-                <a:cs typeface="나눔고딕코딩"/>
+                <a:latin typeface="D2Coding"/>
+                <a:ea typeface="D2Coding"/>
+                <a:cs typeface="D2Coding"/>
               </a:rPr>
               <a:t>4</a:t>
             </a:r>
@@ -26018,9 +26018,9 @@
                 <a:solidFill>
                   <a:srgbClr val="7A869C"/>
                 </a:solidFill>
-                <a:latin typeface="나눔고딕코딩"/>
-                <a:ea typeface="나눔고딕코딩"/>
-                <a:cs typeface="나눔고딕코딩"/>
+                <a:latin typeface="D2Coding"/>
+                <a:ea typeface="D2Coding"/>
+                <a:cs typeface="D2Coding"/>
               </a:rPr>
               <a:t>5</a:t>
             </a:r>
@@ -26036,9 +26036,9 @@
                 <a:solidFill>
                   <a:srgbClr val="7A869C"/>
                 </a:solidFill>
-                <a:latin typeface="나눔고딕코딩"/>
-                <a:ea typeface="나눔고딕코딩"/>
-                <a:cs typeface="나눔고딕코딩"/>
+                <a:latin typeface="D2Coding"/>
+                <a:ea typeface="D2Coding"/>
+                <a:cs typeface="D2Coding"/>
               </a:rPr>
               <a:t>6</a:t>
             </a:r>
@@ -26054,9 +26054,9 @@
                 <a:solidFill>
                   <a:srgbClr val="7A869C"/>
                 </a:solidFill>
-                <a:latin typeface="나눔고딕코딩"/>
-                <a:ea typeface="나눔고딕코딩"/>
-                <a:cs typeface="나눔고딕코딩"/>
+                <a:latin typeface="D2Coding"/>
+                <a:ea typeface="D2Coding"/>
+                <a:cs typeface="D2Coding"/>
               </a:rPr>
               <a:t>7</a:t>
             </a:r>
@@ -26072,9 +26072,9 @@
                 <a:solidFill>
                   <a:srgbClr val="7A869C"/>
                 </a:solidFill>
-                <a:latin typeface="나눔고딕코딩"/>
-                <a:ea typeface="나눔고딕코딩"/>
-                <a:cs typeface="나눔고딕코딩"/>
+                <a:latin typeface="D2Coding"/>
+                <a:ea typeface="D2Coding"/>
+                <a:cs typeface="D2Coding"/>
               </a:rPr>
               <a:t>8</a:t>
             </a:r>
@@ -26090,9 +26090,9 @@
                 <a:solidFill>
                   <a:srgbClr val="7A869C"/>
                 </a:solidFill>
-                <a:latin typeface="나눔고딕코딩"/>
-                <a:ea typeface="나눔고딕코딩"/>
-                <a:cs typeface="나눔고딕코딩"/>
+                <a:latin typeface="D2Coding"/>
+                <a:ea typeface="D2Coding"/>
+                <a:cs typeface="D2Coding"/>
               </a:rPr>
               <a:t>9</a:t>
             </a:r>
@@ -26108,9 +26108,9 @@
                 <a:solidFill>
                   <a:srgbClr val="7A869C"/>
                 </a:solidFill>
-                <a:latin typeface="나눔고딕코딩"/>
-                <a:ea typeface="나눔고딕코딩"/>
-                <a:cs typeface="나눔고딕코딩"/>
+                <a:latin typeface="D2Coding"/>
+                <a:ea typeface="D2Coding"/>
+                <a:cs typeface="D2Coding"/>
               </a:rPr>
               <a:t>10</a:t>
             </a:r>
@@ -26126,9 +26126,9 @@
                 <a:solidFill>
                   <a:srgbClr val="7A869C"/>
                 </a:solidFill>
-                <a:latin typeface="나눔고딕코딩"/>
-                <a:ea typeface="나눔고딕코딩"/>
-                <a:cs typeface="나눔고딕코딩"/>
+                <a:latin typeface="D2Coding"/>
+                <a:ea typeface="D2Coding"/>
+                <a:cs typeface="D2Coding"/>
               </a:rPr>
               <a:t>11</a:t>
             </a:r>
@@ -26144,9 +26144,9 @@
                 <a:solidFill>
                   <a:srgbClr val="7A869C"/>
                 </a:solidFill>
-                <a:latin typeface="나눔고딕코딩"/>
-                <a:ea typeface="나눔고딕코딩"/>
-                <a:cs typeface="나눔고딕코딩"/>
+                <a:latin typeface="D2Coding"/>
+                <a:ea typeface="D2Coding"/>
+                <a:cs typeface="D2Coding"/>
               </a:rPr>
               <a:t>12</a:t>
             </a:r>
@@ -26162,9 +26162,9 @@
                 <a:solidFill>
                   <a:srgbClr val="7A869C"/>
                 </a:solidFill>
-                <a:latin typeface="나눔고딕코딩"/>
-                <a:ea typeface="나눔고딕코딩"/>
-                <a:cs typeface="나눔고딕코딩"/>
+                <a:latin typeface="D2Coding"/>
+                <a:ea typeface="D2Coding"/>
+                <a:cs typeface="D2Coding"/>
               </a:rPr>
               <a:t>13</a:t>
             </a:r>
@@ -26180,9 +26180,9 @@
                 <a:solidFill>
                   <a:srgbClr val="7A869C"/>
                 </a:solidFill>
-                <a:latin typeface="나눔고딕코딩"/>
-                <a:ea typeface="나눔고딕코딩"/>
-                <a:cs typeface="나눔고딕코딩"/>
+                <a:latin typeface="D2Coding"/>
+                <a:ea typeface="D2Coding"/>
+                <a:cs typeface="D2Coding"/>
               </a:rPr>
               <a:t>14</a:t>
             </a:r>
@@ -26221,9 +26221,9 @@
                 <a:solidFill>
                   <a:srgbClr val="E6EAF2"/>
                 </a:solidFill>
-                <a:latin typeface="나눔고딕코딩"/>
-                <a:ea typeface="나눔고딕코딩"/>
-                <a:cs typeface="나눔고딕코딩"/>
+                <a:latin typeface="D2Coding"/>
+                <a:ea typeface="D2Coding"/>
+                <a:cs typeface="D2Coding"/>
               </a:rPr>
               <a:t>START TRANSACTION;</a:t>
             </a:r>
@@ -26239,9 +26239,9 @@
                 <a:solidFill>
                   <a:srgbClr val="E6EAF2"/>
                 </a:solidFill>
-                <a:latin typeface="나눔고딕코딩"/>
-                <a:ea typeface="나눔고딕코딩"/>
-                <a:cs typeface="나눔고딕코딩"/>
+                <a:latin typeface="D2Coding"/>
+                <a:ea typeface="D2Coding"/>
+                <a:cs typeface="D2Coding"/>
               </a:rPr>
               <a:t/>
             </a:r>
@@ -26257,9 +26257,9 @@
                 <a:solidFill>
                   <a:srgbClr val="E6EAF2"/>
                 </a:solidFill>
-                <a:latin typeface="나눔고딕코딩"/>
-                <a:ea typeface="나눔고딕코딩"/>
-                <a:cs typeface="나눔고딕코딩"/>
+                <a:latin typeface="D2Coding"/>
+                <a:ea typeface="D2Coding"/>
+                <a:cs typeface="D2Coding"/>
               </a:rPr>
               <a:t>-- ① 주문 헤더: 고객 C003 김도현, 담당 직원 없는 온라인 주문</a:t>
             </a:r>
@@ -26275,9 +26275,9 @@
                 <a:solidFill>
                   <a:srgbClr val="E6EAF2"/>
                 </a:solidFill>
-                <a:latin typeface="나눔고딕코딩"/>
-                <a:ea typeface="나눔고딕코딩"/>
-                <a:cs typeface="나눔고딕코딩"/>
+                <a:latin typeface="D2Coding"/>
+                <a:ea typeface="D2Coding"/>
+                <a:cs typeface="D2Coding"/>
               </a:rPr>
               <a:t>INSERT INTO orders (cust_id, emp_id, order_date, status)</a:t>
             </a:r>
@@ -26293,9 +26293,9 @@
                 <a:solidFill>
                   <a:srgbClr val="E6EAF2"/>
                 </a:solidFill>
-                <a:latin typeface="나눔고딕코딩"/>
-                <a:ea typeface="나눔고딕코딩"/>
-                <a:cs typeface="나눔고딕코딩"/>
+                <a:latin typeface="D2Coding"/>
+                <a:ea typeface="D2Coding"/>
+                <a:cs typeface="D2Coding"/>
               </a:rPr>
               <a:t>VALUES ('C003', NULL, '2026-06-15', '주문접수');</a:t>
             </a:r>
@@ -26311,9 +26311,9 @@
                 <a:solidFill>
                   <a:srgbClr val="E6EAF2"/>
                 </a:solidFill>
-                <a:latin typeface="나눔고딕코딩"/>
-                <a:ea typeface="나눔고딕코딩"/>
-                <a:cs typeface="나눔고딕코딩"/>
+                <a:latin typeface="D2Coding"/>
+                <a:ea typeface="D2Coding"/>
+                <a:cs typeface="D2Coding"/>
               </a:rPr>
               <a:t/>
             </a:r>
@@ -26329,9 +26329,9 @@
                 <a:solidFill>
                   <a:srgbClr val="E6EAF2"/>
                 </a:solidFill>
-                <a:latin typeface="나눔고딕코딩"/>
-                <a:ea typeface="나눔고딕코딩"/>
-                <a:cs typeface="나눔고딕코딩"/>
+                <a:latin typeface="D2Coding"/>
+                <a:ea typeface="D2Coding"/>
+                <a:cs typeface="D2Coding"/>
               </a:rPr>
               <a:t>-- ② 주문 상세: 무선 전기포트 1대 (방금 생성된 주문번호 사용)</a:t>
             </a:r>
@@ -26347,9 +26347,9 @@
                 <a:solidFill>
                   <a:srgbClr val="E6EAF2"/>
                 </a:solidFill>
-                <a:latin typeface="나눔고딕코딩"/>
-                <a:ea typeface="나눔고딕코딩"/>
-                <a:cs typeface="나눔고딕코딩"/>
+                <a:latin typeface="D2Coding"/>
+                <a:ea typeface="D2Coding"/>
+                <a:cs typeface="D2Coding"/>
               </a:rPr>
               <a:t>INSERT INTO order_items (order_id, prod_id, qty, unit_price)</a:t>
             </a:r>
@@ -26365,9 +26365,9 @@
                 <a:solidFill>
                   <a:srgbClr val="E6EAF2"/>
                 </a:solidFill>
-                <a:latin typeface="나눔고딕코딩"/>
-                <a:ea typeface="나눔고딕코딩"/>
-                <a:cs typeface="나눔고딕코딩"/>
+                <a:latin typeface="D2Coding"/>
+                <a:ea typeface="D2Coding"/>
+                <a:cs typeface="D2Coding"/>
               </a:rPr>
               <a:t>VALUES (LAST_INSERT_ID(), 'P001', 1, 42000);</a:t>
             </a:r>
@@ -26383,9 +26383,9 @@
                 <a:solidFill>
                   <a:srgbClr val="E6EAF2"/>
                 </a:solidFill>
-                <a:latin typeface="나눔고딕코딩"/>
-                <a:ea typeface="나눔고딕코딩"/>
-                <a:cs typeface="나눔고딕코딩"/>
+                <a:latin typeface="D2Coding"/>
+                <a:ea typeface="D2Coding"/>
+                <a:cs typeface="D2Coding"/>
               </a:rPr>
               <a:t/>
             </a:r>
@@ -26401,9 +26401,9 @@
                 <a:solidFill>
                   <a:srgbClr val="E6EAF2"/>
                 </a:solidFill>
-                <a:latin typeface="나눔고딕코딩"/>
-                <a:ea typeface="나눔고딕코딩"/>
-                <a:cs typeface="나눔고딕코딩"/>
+                <a:latin typeface="D2Coding"/>
+                <a:ea typeface="D2Coding"/>
+                <a:cs typeface="D2Coding"/>
               </a:rPr>
               <a:t>-- ③ 재고 차감</a:t>
             </a:r>
@@ -26419,9 +26419,9 @@
                 <a:solidFill>
                   <a:srgbClr val="E6EAF2"/>
                 </a:solidFill>
-                <a:latin typeface="나눔고딕코딩"/>
-                <a:ea typeface="나눔고딕코딩"/>
-                <a:cs typeface="나눔고딕코딩"/>
+                <a:latin typeface="D2Coding"/>
+                <a:ea typeface="D2Coding"/>
+                <a:cs typeface="D2Coding"/>
               </a:rPr>
               <a:t>UPDATE products SET stock = stock - 1 WHERE prod_id = 'P001';</a:t>
             </a:r>
@@ -26437,9 +26437,9 @@
                 <a:solidFill>
                   <a:srgbClr val="E6EAF2"/>
                 </a:solidFill>
-                <a:latin typeface="나눔고딕코딩"/>
-                <a:ea typeface="나눔고딕코딩"/>
-                <a:cs typeface="나눔고딕코딩"/>
+                <a:latin typeface="D2Coding"/>
+                <a:ea typeface="D2Coding"/>
+                <a:cs typeface="D2Coding"/>
               </a:rPr>
               <a:t/>
             </a:r>
@@ -26455,9 +26455,9 @@
                 <a:solidFill>
                   <a:srgbClr val="E6EAF2"/>
                 </a:solidFill>
-                <a:latin typeface="나눔고딕코딩"/>
-                <a:ea typeface="나눔고딕코딩"/>
-                <a:cs typeface="나눔고딕코딩"/>
+                <a:latin typeface="D2Coding"/>
+                <a:ea typeface="D2Coding"/>
+                <a:cs typeface="D2Coding"/>
               </a:rPr>
               <a:t>COMMIT;   -- 세 작업을 한꺼번에 확정</a:t>
             </a:r>
